--- a/docs/复赛材料/finals-v1/MergePilot-复赛材料-v1.pptx
+++ b/docs/复赛材料/finals-v1/MergePilot-复赛材料-v1.pptx
@@ -791,7 +791,7 @@
           <a:p>
             <a:r>
               <a:rPr lang="en-US"/>
-              <a:t>- .impeccable/review/wide.png</a:t>
+              <a:t>- docs/assets/readme/preview4/console-overview-preview4.png</a:t>
             </a:r>
             <a:endParaRPr/>
           </a:p>
@@ -1212,12 +1212,12 @@
           </a:p>
           <a:p>
             <a:r>
-              <a:t>- .impeccable/review/desktop.png</a:t>
-            </a:r>
-          </a:p>
-          <a:p>
-            <a:r>
-              <a:t>- .impeccable/review/desktop-failed.png</a:t>
+              <a:t>- docs/assets/readme/preview4/console-overview-preview4.png</a:t>
+            </a:r>
+          </a:p>
+          <a:p>
+            <a:r>
+              <a:t>- docs/assets/readme/preview4/console-failed-preview4.png</a:t>
             </a:r>
           </a:p>
           <a:p>

--- a/docs/复赛材料/finals-v1/MergePilot-复赛材料-v1.pptx
+++ b/docs/复赛材料/finals-v1/MergePilot-复赛材料-v1.pptx
@@ -142,7 +142,15 @@
           <c:idx val="0"/>
           <c:order val="0"/>
           <c:tx>
-            <c:v>Single Agent</c:v>
+            <c:strRef>
+              <c:f>Sheet1!$B$1</c:f>
+              <c:strCache>
+                <c:ptCount val="1"/>
+                <c:pt idx="0">
+                  <c:v>A 单Agent</c:v>
+                </c:pt>
+              </c:strCache>
+            </c:strRef>
           </c:tx>
           <c:spPr>
             <a:solidFill>
@@ -187,39 +195,45 @@
             </c:extLst>
           </c:dLbls>
           <c:cat>
-            <c:strLit>
-              <c:ptCount val="4"/>
-              <c:pt idx="0">
-                <c:v>Precision</c:v>
-              </c:pt>
-              <c:pt idx="1">
-                <c:v>Recall</c:v>
-              </c:pt>
-              <c:pt idx="2">
-                <c:v>F1</c:v>
-              </c:pt>
-              <c:pt idx="3">
-                <c:v>Decision accuracy</c:v>
-              </c:pt>
-            </c:strLit>
+            <c:strRef>
+              <c:f>Sheet1!$A$2:$A$5</c:f>
+              <c:strCache>
+                <c:ptCount val="4"/>
+                <c:pt idx="0">
+                  <c:v>Precision</c:v>
+                </c:pt>
+                <c:pt idx="1">
+                  <c:v>Recall</c:v>
+                </c:pt>
+                <c:pt idx="2">
+                  <c:v>F1</c:v>
+                </c:pt>
+                <c:pt idx="3">
+                  <c:v>Decision acc.</c:v>
+                </c:pt>
+              </c:strCache>
+            </c:strRef>
           </c:cat>
           <c:val>
-            <c:numLit>
-              <c:formatCode>General</c:formatCode>
-              <c:ptCount val="4"/>
-              <c:pt idx="0">
-                <c:v>36.36</c:v>
-              </c:pt>
-              <c:pt idx="1">
-                <c:v>70.59</c:v>
-              </c:pt>
-              <c:pt idx="2">
-                <c:v>48</c:v>
-              </c:pt>
-              <c:pt idx="3">
-                <c:v>50</c:v>
-              </c:pt>
-            </c:numLit>
+            <c:numRef>
+              <c:f>Sheet1!$B$2:$B$5</c:f>
+              <c:numCache>
+                <c:formatCode>General</c:formatCode>
+                <c:ptCount val="4"/>
+                <c:pt idx="0">
+                  <c:v>34.97</c:v>
+                </c:pt>
+                <c:pt idx="1">
+                  <c:v>66.67</c:v>
+                </c:pt>
+                <c:pt idx="2">
+                  <c:v>45.87</c:v>
+                </c:pt>
+                <c:pt idx="3">
+                  <c:v>33.33</c:v>
+                </c:pt>
+              </c:numCache>
+            </c:numRef>
           </c:val>
           <c:extLst>
             <c:ext xmlns:c14="http://schemas.microsoft.com/office/drawing/2007/8/2/chart" uri="{6F2FDCE9-48DA-4B69-8628-5D25D57E5C99}">
@@ -240,7 +254,15 @@
           <c:idx val="1"/>
           <c:order val="1"/>
           <c:tx>
-            <c:v>MergePilot</c:v>
+            <c:strRef>
+              <c:f>Sheet1!$C$1</c:f>
+              <c:strCache>
+                <c:ptCount val="1"/>
+                <c:pt idx="0">
+                  <c:v>B 多角色</c:v>
+                </c:pt>
+              </c:strCache>
+            </c:strRef>
           </c:tx>
           <c:spPr>
             <a:solidFill>
@@ -285,39 +307,45 @@
             </c:extLst>
           </c:dLbls>
           <c:cat>
-            <c:strLit>
-              <c:ptCount val="4"/>
-              <c:pt idx="0">
-                <c:v>Precision</c:v>
-              </c:pt>
-              <c:pt idx="1">
-                <c:v>Recall</c:v>
-              </c:pt>
-              <c:pt idx="2">
-                <c:v>F1</c:v>
-              </c:pt>
-              <c:pt idx="3">
-                <c:v>Decision accuracy</c:v>
-              </c:pt>
-            </c:strLit>
+            <c:strRef>
+              <c:f>Sheet1!$A$2:$A$5</c:f>
+              <c:strCache>
+                <c:ptCount val="4"/>
+                <c:pt idx="0">
+                  <c:v>Precision</c:v>
+                </c:pt>
+                <c:pt idx="1">
+                  <c:v>Recall</c:v>
+                </c:pt>
+                <c:pt idx="2">
+                  <c:v>F1</c:v>
+                </c:pt>
+                <c:pt idx="3">
+                  <c:v>Decision acc.</c:v>
+                </c:pt>
+              </c:strCache>
+            </c:strRef>
           </c:cat>
           <c:val>
-            <c:numLit>
-              <c:formatCode>General</c:formatCode>
-              <c:ptCount val="4"/>
-              <c:pt idx="0">
-                <c:v>57.14</c:v>
-              </c:pt>
-              <c:pt idx="1">
-                <c:v>70.59</c:v>
-              </c:pt>
-              <c:pt idx="2">
-                <c:v>63.16</c:v>
-              </c:pt>
-              <c:pt idx="3">
-                <c:v>40</c:v>
-              </c:pt>
-            </c:numLit>
+            <c:numRef>
+              <c:f>Sheet1!$C$2:$C$5</c:f>
+              <c:numCache>
+                <c:formatCode>General</c:formatCode>
+                <c:ptCount val="4"/>
+                <c:pt idx="0">
+                  <c:v>45.13</c:v>
+                </c:pt>
+                <c:pt idx="1">
+                  <c:v>68.0</c:v>
+                </c:pt>
+                <c:pt idx="2">
+                  <c:v>54.26</c:v>
+                </c:pt>
+                <c:pt idx="3">
+                  <c:v>63.33</c:v>
+                </c:pt>
+              </c:numCache>
+            </c:numRef>
           </c:val>
           <c:extLst>
             <c:ext xmlns:c14="http://schemas.microsoft.com/office/drawing/2007/8/2/chart" uri="{6F2FDCE9-48DA-4B69-8628-5D25D57E5C99}">
@@ -471,6 +499,9 @@
       <a:prstDash val="solid"/>
     </a:ln>
   </c:spPr>
+  <c:externalData r:id="rId1">
+    <c:autoUpdate val="0"/>
+  </c:externalData>
 </c:chartSpace>
 </file>
 
@@ -1480,19 +1511,13 @@
           <a:lstStyle/>
           <a:p>
             <a:r>
-              <a:t>这组N=10乘2的受控本地评测显示，多角色编排主要减少误报，但没有提升召回，决策准确率反而下降，同时增加token和请求成本。因此它是方向性证据，不是多Agent必然更好的结论。</a:t>
-            </a:r>
-          </a:p>
-          <a:p>
-            <a:endParaRPr/>
-          </a:p>
-          <a:p>
-            <a:r>
-              <a:t>[Boundary] 单模型、合成fixture、每组仅10例、非真实Gateway/GitHub/HiClaw全链。</a:t>
-            </a:r>
-          </a:p>
-          <a:p>
-            <a:endParaRPr/>
+              <a:t>20个合成fixture、A/B各3次的受控本地评测：多角色编排把precision从34.97%提高到45.13%（+10.17pp，95%CI +1.9~+19.9），F1从45.87%到54.26%（+8.38pp，95%CI +1.4~+16.7），decision accuracy从33.33%到63.33%（+30.00pp，但CI宽且跨0），recall基本持平（+1.33pp，CI跨0）。代价明确：token +245.1%、API请求 +90.0%。Clean-case误报：FP findings 18→14，出现FP的clean run 8/12→6/12。这是方向性证据；CI不跨0不等于统计显著或因果证明。</a:t>
+            </a:r>
+          </a:p>
+          <a:p>
+            <a:r>
+              <a:t>[Boundary] 合成fixture受控评测；deepseek-v4-flash，模型版本与2026-08-11一致性NOT_CONFIRMED，不可与历史基线直接归因比较；Controller/Gateway/GitHub MCP/真实E2E未参与；不代表production ready。</a:t>
+            </a:r>
           </a:p>
           <a:p>
             <a:r>
@@ -1501,17 +1526,17 @@
           </a:p>
           <a:p>
             <a:r>
-              <a:t>- benchmark/formal-summary.md</a:t>
-            </a:r>
-          </a:p>
-          <a:p>
-            <a:r>
-              <a:t>- benchmark/raw-runs/</a:t>
-            </a:r>
-          </a:p>
-          <a:p>
-            <a:r>
-              <a:t>- benchmark/freeze_formal_results.py</a:t>
+              <a:t>- benchmark/preview4-refresh-formal-20260826/summary.json（material-claims.json 同目录）</a:t>
+            </a:r>
+          </a:p>
+          <a:p>
+            <a:r>
+              <a:t>- product commit 5bb2635 · benchmark commit 7831fbf（branch benchmark/preview4-formal-20260826）</a:t>
+            </a:r>
+          </a:p>
+          <a:p>
+            <a:r>
+              <a:t>- 其余CI：Recall Δ95%CI [−4.2,+8.3]pp；Decision acc Δ95%CI [−45.0,+56.7]pp；clean-FP Δ CI [−28,+18]</a:t>
             </a:r>
           </a:p>
         </p:txBody>
@@ -10770,15 +10795,8 @@
               </a:defRPr>
             </a:pPr>
             <a:r>
-              <a:rPr sz="1125" b="1">
-                <a:solidFill>
-                  <a:srgbClr val="667085"/>
-                </a:solidFill>
-                <a:latin typeface="Microsoft YaHei"/>
-                <a:ea typeface="Microsoft YaHei"/>
-                <a:cs typeface="Microsoft YaHei"/>
-              </a:rPr>
-              <a:t>N=10×2 受控本地评测</a:t>
+              <a:rPr b="1"/>
+              <a:t>20 合成 fixture × A/B × 3 次 · 120/120 Schema 合规</a:t>
             </a:r>
           </a:p>
         </p:txBody>
@@ -10828,15 +10846,8 @@
               </a:defRPr>
             </a:pPr>
             <a:r>
-              <a:rPr sz="3600" b="1">
-                <a:solidFill>
-                  <a:srgbClr val="111827"/>
-                </a:solidFill>
-                <a:latin typeface="Microsoft YaHei"/>
-                <a:ea typeface="Microsoft YaHei"/>
-                <a:cs typeface="Microsoft YaHei"/>
-              </a:rPr>
-              <a:t>误报下降，但成本与校准仍需改进</a:t>
+              <a:rPr b="1"/>
+              <a:t>受控评测：多角色编排降低误报，但成本明显上升</a:t>
             </a:r>
           </a:p>
         </p:txBody>
@@ -10924,15 +10935,7 @@
               </a:defRPr>
             </a:pPr>
             <a:r>
-              <a:rPr lang="en-US" sz="900" b="0">
-                <a:solidFill>
-                  <a:srgbClr val="667085"/>
-                </a:solidFill>
-                <a:latin typeface="Cascadia Mono"/>
-                <a:ea typeface="Cascadia Mono"/>
-                <a:cs typeface="Cascadia Mono"/>
-              </a:rPr>
-              <a:t>MergePilot · v0.1.0-preview.4</a:t>
+              <a:t>product 5bb2635 · benchmark 7831fbf</a:t>
             </a:r>
             <a:endParaRPr sz="900" b="0">
               <a:solidFill>
@@ -11106,15 +11109,8 @@
               </a:defRPr>
             </a:pPr>
             <a:r>
-              <a:rPr sz="2250" b="1">
-                <a:solidFill>
-                  <a:srgbClr val="149A5B"/>
-                </a:solidFill>
-                <a:latin typeface="Cascadia Mono"/>
-                <a:ea typeface="Cascadia Mono"/>
-                <a:cs typeface="Cascadia Mono"/>
-              </a:rPr>
-              <a:t>FP  21 → 9</a:t>
+              <a:rPr sz="2000" b="1"/>
+              <a:t>Precision  34.97% → 45.13%</a:t>
             </a:r>
           </a:p>
         </p:txBody>
@@ -11164,15 +11160,8 @@
               </a:defRPr>
             </a:pPr>
             <a:r>
-              <a:rPr sz="1275" b="0">
-                <a:solidFill>
-                  <a:srgbClr val="667085"/>
-                </a:solidFill>
-                <a:latin typeface="Microsoft YaHei"/>
-                <a:ea typeface="Microsoft YaHei"/>
-                <a:cs typeface="Microsoft YaHei"/>
-              </a:rPr>
-              <a:t>主要改善来自误报下降</a:t>
+              <a:rPr sz="1400" b="1"/>
+              <a:t>F1  45.87% → 54.26%（+8.38pp）</a:t>
             </a:r>
           </a:p>
         </p:txBody>
@@ -11264,73 +11253,59 @@
               </a:defRPr>
             </a:pPr>
             <a:r>
-              <a:rPr sz="2025" b="1">
-                <a:solidFill>
-                  <a:srgbClr val="F28C28"/>
+              <a:rPr sz="1600" b="1"/>
+              <a:t>Token  96,746 → 333,837（+245.1%）</a:t>
+            </a:r>
+          </a:p>
+        </p:txBody>
+      </p:sp>
+      <p:sp>
+        <p:nvSpPr>
+          <p:cNvPr id="13" name="矩形 12">
+            <a:extLst>
+              <a:ext uri="{FF2B5EF4-FFF2-40B4-BE49-F238E27FC236}">
+                <a16:creationId xmlns:a16="http://schemas.microsoft.com/office/drawing/2014/main" id="{62171576-758F-4B52-B530-1659A3A733B4}"/>
+              </a:ext>
+            </a:extLst>
+          </p:cNvPr>
+          <p:cNvSpPr>
+            <a:spLocks noGrp="1"/>
+          </p:cNvSpPr>
+          <p:nvPr/>
+        </p:nvSpPr>
+        <p:spPr>
+          <a:xfrm>
+            <a:off x="7962900" y="3848100"/>
+            <a:ext cx="3086100" cy="247650"/>
+          </a:xfrm>
+          <a:prstGeom prst="rect">
+            <a:avLst/>
+          </a:prstGeom>
+          <a:noFill/>
+          <a:ln w="0">
+            <a:noFill/>
+            <a:prstDash val="solid"/>
+          </a:ln>
+        </p:spPr>
+        <p:txBody>
+          <a:bodyPr wrap="square" lIns="0" tIns="0" rIns="0" bIns="0" anchor="t">
+            <a:normAutofit/>
+          </a:bodyPr>
+          <a:lstStyle/>
+          <a:p>
+            <a:pPr algn="l">
+              <a:defRPr sz="1275" b="0">
+                <a:solidFill>
+                  <a:srgbClr val="667085"/>
                 </a:solidFill>
                 <a:latin typeface="Cascadia Mono"/>
                 <a:ea typeface="Cascadia Mono"/>
                 <a:cs typeface="Cascadia Mono"/>
-              </a:rPr>
-              <a:t>Token  +32.95%</a:t>
-            </a:r>
-          </a:p>
-        </p:txBody>
-      </p:sp>
-      <p:sp>
-        <p:nvSpPr>
-          <p:cNvPr id="13" name="矩形 12">
-            <a:extLst>
-              <a:ext uri="{FF2B5EF4-FFF2-40B4-BE49-F238E27FC236}">
-                <a16:creationId xmlns:a16="http://schemas.microsoft.com/office/drawing/2014/main" id="{62171576-758F-4B52-B530-1659A3A733B4}"/>
-              </a:ext>
-            </a:extLst>
-          </p:cNvPr>
-          <p:cNvSpPr>
-            <a:spLocks noGrp="1"/>
-          </p:cNvSpPr>
-          <p:nvPr/>
-        </p:nvSpPr>
-        <p:spPr>
-          <a:xfrm>
-            <a:off x="7962900" y="3848100"/>
-            <a:ext cx="3086100" cy="247650"/>
-          </a:xfrm>
-          <a:prstGeom prst="rect">
-            <a:avLst/>
-          </a:prstGeom>
-          <a:noFill/>
-          <a:ln w="0">
-            <a:noFill/>
-            <a:prstDash val="solid"/>
-          </a:ln>
-        </p:spPr>
-        <p:txBody>
-          <a:bodyPr wrap="square" lIns="0" tIns="0" rIns="0" bIns="0" anchor="t">
-            <a:normAutofit/>
-          </a:bodyPr>
-          <a:lstStyle/>
-          <a:p>
-            <a:pPr algn="l">
-              <a:defRPr sz="1275" b="0">
-                <a:solidFill>
-                  <a:srgbClr val="667085"/>
-                </a:solidFill>
-                <a:latin typeface="Cascadia Mono"/>
-                <a:ea typeface="Cascadia Mono"/>
-                <a:cs typeface="Cascadia Mono"/>
-              </a:defRPr>
-            </a:pPr>
-            <a:r>
-              <a:rPr sz="1275" b="0">
-                <a:solidFill>
-                  <a:srgbClr val="667085"/>
-                </a:solidFill>
-                <a:latin typeface="Cascadia Mono"/>
-                <a:ea typeface="Cascadia Mono"/>
-                <a:cs typeface="Cascadia Mono"/>
-              </a:rPr>
-              <a:t>API requests  +80%</a:t>
+              </a:defRPr>
+            </a:pPr>
+            <a:r>
+              <a:rPr sz="1400" b="1"/>
+              <a:t>API  60 → 114（+90.0%）· Fixer 54/60</a:t>
             </a:r>
           </a:p>
         </p:txBody>
@@ -11422,15 +11397,8 @@
               </a:defRPr>
             </a:pPr>
             <a:r>
-              <a:rPr sz="1575" b="1">
-                <a:solidFill>
-                  <a:srgbClr val="C43D32"/>
-                </a:solidFill>
-                <a:latin typeface="Microsoft YaHei"/>
-                <a:ea typeface="Microsoft YaHei"/>
-                <a:cs typeface="Microsoft YaHei"/>
-              </a:rPr>
-              <a:t>不能声明“多 Agent 必然更好”</a:t>
+              <a:rPr sz="1400" b="1"/>
+              <a:t>合成 fixture 受控评测，非真实全链；不作显著性宣称</a:t>
             </a:r>
           </a:p>
         </p:txBody>
@@ -11480,15 +11448,12 @@
               </a:defRPr>
             </a:pPr>
             <a:r>
-              <a:rPr sz="1125" b="0">
-                <a:solidFill>
-                  <a:srgbClr val="667085"/>
-                </a:solidFill>
-                <a:latin typeface="Microsoft YaHei"/>
-                <a:ea typeface="Microsoft YaHei"/>
-                <a:cs typeface="Microsoft YaHei"/>
-              </a:rPr>
-              <a:t>单模型 · 合成 fixture · 每组 10 例</a:t>
+              <a:t>deepseek-v4-flash · 版本一致性 NOT_CONFIRMED</a:t>
+            </a:r>
+          </a:p>
+          <a:p>
+            <a:r>
+              <a:t>合成 fixture · 不代表 production ready · 历史基线不可直接比较</a:t>
             </a:r>
           </a:p>
         </p:txBody>
